--- a/pitch/GrantOnce.pptx
+++ b/pitch/GrantOnce.pptx
@@ -3520,32 +3520,32 @@
         </p:nvSpPr>
         <p:spPr>
           <a:xfrm>
-            <a:off x="731520" y="1645920"/>
-            <a:ext cx="10515600" cy="914400"/>
-          </a:xfrm>
-          <a:prstGeom prst="rect">
-            <a:avLst/>
-          </a:prstGeom>
-          <a:noFill/>
-        </p:spPr>
-        <p:txBody>
-          <a:bodyPr wrap="square" anchor="t"/>
-          <a:lstStyle/>
-          <a:p>
-            <a:pPr algn="l">
-              <a:spcAft>
-                <a:spcPts val="600"/>
-              </a:spcAft>
-            </a:pPr>
-            <a:r>
-              <a:rPr sz="3200" b="1">
+            <a:off x="731520" y="1051560"/>
+            <a:ext cx="10515600" cy="640080"/>
+          </a:xfrm>
+          <a:prstGeom prst="rect">
+            <a:avLst/>
+          </a:prstGeom>
+          <a:noFill/>
+        </p:spPr>
+        <p:txBody>
+          <a:bodyPr wrap="square" anchor="t"/>
+          <a:lstStyle/>
+          <a:p>
+            <a:pPr algn="l">
+              <a:spcAft>
+                <a:spcPts val="600"/>
+              </a:spcAft>
+            </a:pPr>
+            <a:r>
+              <a:rPr sz="2400" b="1">
                 <a:solidFill>
                   <a:srgbClr val="1C1612"/>
                 </a:solidFill>
                 <a:latin typeface="Microsoft JhengHei"/>
                 <a:rFonts ascii="Microsoft JhengHei" hAnsi="Microsoft JhengHei" eastAsia="Microsoft JhengHei" cs="Microsoft JhengHei"/>
               </a:rPr>
-              <a:t>多個委託人，約束同一個代理人。</a:t>
+              <a:t>多個委託人，約束同一個代理人。一人一匣。</a:t>
             </a:r>
           </a:p>
         </p:txBody>
@@ -3558,32 +3558,32 @@
         </p:nvSpPr>
         <p:spPr>
           <a:xfrm>
-            <a:off x="731520" y="2926080"/>
-            <a:ext cx="10515600" cy="640080"/>
-          </a:xfrm>
-          <a:prstGeom prst="rect">
-            <a:avLst/>
-          </a:prstGeom>
-          <a:noFill/>
-        </p:spPr>
-        <p:txBody>
-          <a:bodyPr wrap="square" anchor="t"/>
-          <a:lstStyle/>
-          <a:p>
-            <a:pPr algn="l">
-              <a:spcAft>
-                <a:spcPts val="600"/>
-              </a:spcAft>
-            </a:pPr>
-            <a:r>
-              <a:rPr sz="3200" b="1">
+            <a:off x="731520" y="1965960"/>
+            <a:ext cx="10515600" cy="457200"/>
+          </a:xfrm>
+          <a:prstGeom prst="rect">
+            <a:avLst/>
+          </a:prstGeom>
+          <a:noFill/>
+        </p:spPr>
+        <p:txBody>
+          <a:bodyPr wrap="square" anchor="t"/>
+          <a:lstStyle/>
+          <a:p>
+            <a:pPr algn="l">
+              <a:spcAft>
+                <a:spcPts val="600"/>
+              </a:spcAft>
+            </a:pPr>
+            <a:r>
+              <a:rPr sz="2800" b="1">
                 <a:solidFill>
                   <a:srgbClr val="1F4A3D"/>
                 </a:solidFill>
                 <a:latin typeface="Microsoft JhengHei"/>
                 <a:rFonts ascii="Microsoft JhengHei" hAnsi="Microsoft JhengHei" eastAsia="Microsoft JhengHei" cs="Microsoft JhengHei"/>
               </a:rPr>
-              <a:t>一人一匣。</a:t>
+              <a:t>同一套 Grant。換簽發人。</a:t>
             </a:r>
           </a:p>
         </p:txBody>
@@ -3596,39 +3596,115 @@
         </p:nvSpPr>
         <p:spPr>
           <a:xfrm>
-            <a:off x="731520" y="3931920"/>
-            <a:ext cx="10515600" cy="640080"/>
-          </a:xfrm>
-          <a:prstGeom prst="rect">
-            <a:avLst/>
-          </a:prstGeom>
-          <a:noFill/>
-        </p:spPr>
-        <p:txBody>
-          <a:bodyPr wrap="square" anchor="t"/>
-          <a:lstStyle/>
-          <a:p>
-            <a:pPr algn="l">
-              <a:spcAft>
-                <a:spcPts val="600"/>
-              </a:spcAft>
-            </a:pPr>
-            <a:r>
-              <a:rPr sz="2200" b="0">
+            <a:off x="731520" y="2743200"/>
+            <a:ext cx="10515600" cy="502920"/>
+          </a:xfrm>
+          <a:prstGeom prst="rect">
+            <a:avLst/>
+          </a:prstGeom>
+          <a:noFill/>
+        </p:spPr>
+        <p:txBody>
+          <a:bodyPr wrap="square" anchor="t"/>
+          <a:lstStyle/>
+          <a:p>
+            <a:pPr algn="l">
+              <a:spcAft>
+                <a:spcPts val="600"/>
+              </a:spcAft>
+            </a:pPr>
+            <a:r>
+              <a:rPr sz="2000" b="0">
+                <a:solidFill>
+                  <a:srgbClr val="1C1612"/>
+                </a:solidFill>
+                <a:latin typeface="Microsoft JhengHei"/>
+                <a:rFonts ascii="Microsoft JhengHei" hAnsi="Microsoft JhengHei" eastAsia="Microsoft JhengHei" cs="Microsoft JhengHei"/>
+              </a:rPr>
+              <a:t>主家搬家：簽發人 = 本人（同意）</a:t>
+            </a:r>
+          </a:p>
+        </p:txBody>
+      </p:sp>
+      <p:sp>
+        <p:nvSpPr>
+          <p:cNvPr id="7" name="TextBox 6"/>
+          <p:cNvSpPr txBox="1"/>
+          <p:nvPr/>
+        </p:nvSpPr>
+        <p:spPr>
+          <a:xfrm>
+            <a:off x="731520" y="3246120"/>
+            <a:ext cx="10515600" cy="502920"/>
+          </a:xfrm>
+          <a:prstGeom prst="rect">
+            <a:avLst/>
+          </a:prstGeom>
+          <a:noFill/>
+        </p:spPr>
+        <p:txBody>
+          <a:bodyPr wrap="square" anchor="t"/>
+          <a:lstStyle/>
+          <a:p>
+            <a:pPr algn="l">
+              <a:spcAft>
+                <a:spcPts val="600"/>
+              </a:spcAft>
+            </a:pPr>
+            <a:r>
+              <a:rPr sz="2000" b="0">
+                <a:solidFill>
+                  <a:srgbClr val="1C1612"/>
+                </a:solidFill>
+                <a:latin typeface="Microsoft JhengHei"/>
+                <a:rFonts ascii="Microsoft JhengHei" hAnsi="Microsoft JhengHei" eastAsia="Microsoft JhengHei" cs="Microsoft JhengHei"/>
+              </a:rPr>
+              <a:t>執法調閱：簽發人 = 法院／搜索票，不是機關甲</a:t>
+            </a:r>
+          </a:p>
+        </p:txBody>
+      </p:sp>
+      <p:sp>
+        <p:nvSpPr>
+          <p:cNvPr id="8" name="TextBox 7"/>
+          <p:cNvSpPr txBox="1"/>
+          <p:nvPr/>
+        </p:nvSpPr>
+        <p:spPr>
+          <a:xfrm>
+            <a:off x="731520" y="4114800"/>
+            <a:ext cx="10515600" cy="822960"/>
+          </a:xfrm>
+          <a:prstGeom prst="rect">
+            <a:avLst/>
+          </a:prstGeom>
+          <a:noFill/>
+        </p:spPr>
+        <p:txBody>
+          <a:bodyPr wrap="square" anchor="t"/>
+          <a:lstStyle/>
+          <a:p>
+            <a:pPr algn="l">
+              <a:spcAft>
+                <a:spcPts val="600"/>
+              </a:spcAft>
+            </a:pPr>
+            <a:r>
+              <a:rPr sz="1800" b="0">
                 <a:solidFill>
                   <a:srgbClr val="6B6258"/>
                 </a:solidFill>
                 <a:latin typeface="Microsoft JhengHei"/>
                 <a:rFonts ascii="Microsoft JhengHei" hAnsi="Microsoft JhengHei" eastAsia="Microsoft JhengHei" cs="Microsoft JhengHei"/>
               </a:rPr>
-              <a:t>不是一人一把萬能鑰匙。</a:t>
-            </a:r>
-          </a:p>
-        </p:txBody>
-      </p:sp>
-      <p:sp>
-        <p:nvSpPr>
-          <p:cNvPr id="7" name="TextBox 6"/>
+              <a:t>甲是收件人。乙仍簽署這包是他的。人還在場。</a:t>
+            </a:r>
+          </a:p>
+        </p:txBody>
+      </p:sp>
+      <p:sp>
+        <p:nvSpPr>
+          <p:cNvPr id="9" name="TextBox 8"/>
           <p:cNvSpPr txBox="1"/>
           <p:nvPr/>
         </p:nvSpPr>
@@ -3666,7 +3742,7 @@
       </p:sp>
       <p:sp>
         <p:nvSpPr>
-          <p:cNvPr id="8" name="TextBox 7"/>
+          <p:cNvPr id="10" name="TextBox 9"/>
           <p:cNvSpPr txBox="1"/>
           <p:nvPr/>
         </p:nvSpPr>
@@ -6983,7 +7059,7 @@
         </p:nvSpPr>
         <p:spPr>
           <a:xfrm>
-            <a:off x="548640" y="640080"/>
+            <a:off x="548640" y="777240"/>
             <a:ext cx="11064240" cy="365760"/>
           </a:xfrm>
           <a:prstGeom prst="rect">
@@ -7008,38 +7084,482 @@
                 <a:latin typeface="Microsoft JhengHei"/>
                 <a:rFonts ascii="Microsoft JhengHei" hAnsi="Microsoft JhengHei" eastAsia="Microsoft JhengHei" cs="Microsoft JhengHei"/>
               </a:rPr>
-              <a:t>委託人　｜　代理人　｜　機關＋稽核</a:t>
-            </a:r>
-          </a:p>
-        </p:txBody>
-      </p:sp>
-      <p:pic>
-        <p:nvPicPr>
-          <p:cNvPr id="5" name="Picture 4" descr="02-two-grants.png"/>
-          <p:cNvPicPr>
-            <a:picLocks noChangeAspect="1"/>
-          </p:cNvPicPr>
-          <p:nvPr/>
-        </p:nvPicPr>
-        <p:blipFill>
-          <a:blip r:embed="rId2"/>
-          <a:stretch>
-            <a:fillRect/>
-          </a:stretch>
-        </p:blipFill>
-        <p:spPr>
-          <a:xfrm>
-            <a:off x="1554480" y="1097280"/>
-            <a:ext cx="8119872" cy="5074920"/>
-          </a:xfrm>
-          <a:prstGeom prst="rect">
-            <a:avLst/>
-          </a:prstGeom>
-        </p:spPr>
-      </p:pic>
+              <a:t>三欄同一畫面。看這四件事。</a:t>
+            </a:r>
+          </a:p>
+        </p:txBody>
+      </p:sp>
+      <p:sp>
+        <p:nvSpPr>
+          <p:cNvPr id="5" name="Rounded Rectangle 4"/>
+          <p:cNvSpPr/>
+          <p:nvPr/>
+        </p:nvSpPr>
+        <p:spPr>
+          <a:xfrm>
+            <a:off x="548640" y="1371600"/>
+            <a:ext cx="2651760" cy="4023360"/>
+          </a:xfrm>
+          <a:prstGeom prst="roundRect">
+            <a:avLst/>
+          </a:prstGeom>
+          <a:solidFill>
+            <a:srgbClr val="FBF7EE"/>
+          </a:solidFill>
+          <a:ln>
+            <a:solidFill>
+              <a:srgbClr val="D9D0C0"/>
+            </a:solidFill>
+          </a:ln>
+        </p:spPr>
+        <p:style>
+          <a:lnRef idx="1">
+            <a:schemeClr val="accent1"/>
+          </a:lnRef>
+          <a:fillRef idx="3">
+            <a:schemeClr val="accent1"/>
+          </a:fillRef>
+          <a:effectRef idx="2">
+            <a:schemeClr val="accent1"/>
+          </a:effectRef>
+          <a:fontRef idx="minor">
+            <a:schemeClr val="lt1"/>
+          </a:fontRef>
+        </p:style>
+        <p:txBody>
+          <a:bodyPr rtlCol="0" anchor="ctr"/>
+          <a:lstStyle/>
+          <a:p>
+            <a:pPr algn="ctr"/>
+          </a:p>
+        </p:txBody>
+      </p:sp>
       <p:sp>
         <p:nvSpPr>
           <p:cNvPr id="6" name="TextBox 5"/>
+          <p:cNvSpPr txBox="1"/>
+          <p:nvPr/>
+        </p:nvSpPr>
+        <p:spPr>
+          <a:xfrm>
+            <a:off x="713232" y="1554480"/>
+            <a:ext cx="2331720" cy="3657600"/>
+          </a:xfrm>
+          <a:prstGeom prst="rect">
+            <a:avLst/>
+          </a:prstGeom>
+          <a:noFill/>
+        </p:spPr>
+        <p:txBody>
+          <a:bodyPr wrap="square" anchor="t"/>
+          <a:lstStyle/>
+          <a:p>
+            <a:pPr algn="l">
+              <a:spcAft>
+                <a:spcPts val="600"/>
+              </a:spcAft>
+            </a:pPr>
+            <a:r>
+              <a:rPr sz="1400" b="1">
+                <a:solidFill>
+                  <a:srgbClr val="6B6258"/>
+                </a:solidFill>
+                <a:latin typeface="Microsoft JhengHei"/>
+                <a:rFonts ascii="Microsoft JhengHei" hAnsi="Microsoft JhengHei" eastAsia="Microsoft JhengHei" cs="Microsoft JhengHei"/>
+              </a:rPr>
+              <a:t>甲匣</a:t>
+            </a:r>
+          </a:p>
+          <a:p>
+            <a:pPr algn="l">
+              <a:spcAft>
+                <a:spcPts val="600"/>
+              </a:spcAft>
+            </a:pPr>
+            <a:r>
+              <a:rPr sz="2200" b="1">
+                <a:solidFill>
+                  <a:srgbClr val="1C1612"/>
+                </a:solidFill>
+                <a:latin typeface="Microsoft JhengHei"/>
+                <a:rFonts ascii="Microsoft JhengHei" hAnsi="Microsoft JhengHei" eastAsia="Microsoft JhengHei" cs="Microsoft JhengHei"/>
+              </a:rPr>
+              <a:t>戶籍＋親子</a:t>
+            </a:r>
+          </a:p>
+          <a:p>
+            <a:pPr algn="l">
+              <a:spcAft>
+                <a:spcPts val="600"/>
+              </a:spcAft>
+            </a:pPr>
+            <a:r>
+              <a:rPr sz="1400" b="0">
+                <a:solidFill>
+                  <a:srgbClr val="6B6258"/>
+                </a:solidFill>
+                <a:latin typeface="Microsoft JhengHei"/>
+                <a:rFonts ascii="Microsoft JhengHei" hAnsi="Microsoft JhengHei" eastAsia="Microsoft JhengHei" cs="Microsoft JhengHei"/>
+              </a:rPr>
+              <a:t>沒有電號、所得</a:t>
+            </a:r>
+          </a:p>
+        </p:txBody>
+      </p:sp>
+      <p:sp>
+        <p:nvSpPr>
+          <p:cNvPr id="7" name="Rounded Rectangle 6"/>
+          <p:cNvSpPr/>
+          <p:nvPr/>
+        </p:nvSpPr>
+        <p:spPr>
+          <a:xfrm>
+            <a:off x="3429000" y="1371600"/>
+            <a:ext cx="2651760" cy="4023360"/>
+          </a:xfrm>
+          <a:prstGeom prst="roundRect">
+            <a:avLst/>
+          </a:prstGeom>
+          <a:solidFill>
+            <a:srgbClr val="FBF7EE"/>
+          </a:solidFill>
+          <a:ln>
+            <a:solidFill>
+              <a:srgbClr val="D9D0C0"/>
+            </a:solidFill>
+          </a:ln>
+        </p:spPr>
+        <p:style>
+          <a:lnRef idx="1">
+            <a:schemeClr val="accent1"/>
+          </a:lnRef>
+          <a:fillRef idx="3">
+            <a:schemeClr val="accent1"/>
+          </a:fillRef>
+          <a:effectRef idx="2">
+            <a:schemeClr val="accent1"/>
+          </a:effectRef>
+          <a:fontRef idx="minor">
+            <a:schemeClr val="lt1"/>
+          </a:fontRef>
+        </p:style>
+        <p:txBody>
+          <a:bodyPr rtlCol="0" anchor="ctr"/>
+          <a:lstStyle/>
+          <a:p>
+            <a:pPr algn="ctr"/>
+          </a:p>
+        </p:txBody>
+      </p:sp>
+      <p:sp>
+        <p:nvSpPr>
+          <p:cNvPr id="8" name="TextBox 7"/>
+          <p:cNvSpPr txBox="1"/>
+          <p:nvPr/>
+        </p:nvSpPr>
+        <p:spPr>
+          <a:xfrm>
+            <a:off x="3593592" y="1554480"/>
+            <a:ext cx="2331720" cy="3657600"/>
+          </a:xfrm>
+          <a:prstGeom prst="rect">
+            <a:avLst/>
+          </a:prstGeom>
+          <a:noFill/>
+        </p:spPr>
+        <p:txBody>
+          <a:bodyPr wrap="square" anchor="t"/>
+          <a:lstStyle/>
+          <a:p>
+            <a:pPr algn="l">
+              <a:spcAft>
+                <a:spcPts val="600"/>
+              </a:spcAft>
+            </a:pPr>
+            <a:r>
+              <a:rPr sz="1400" b="1">
+                <a:solidFill>
+                  <a:srgbClr val="6B6258"/>
+                </a:solidFill>
+                <a:latin typeface="Microsoft JhengHei"/>
+                <a:rFonts ascii="Microsoft JhengHei" hAnsi="Microsoft JhengHei" eastAsia="Microsoft JhengHei" cs="Microsoft JhengHei"/>
+              </a:rPr>
+              <a:t>乙匣</a:t>
+            </a:r>
+          </a:p>
+          <a:p>
+            <a:pPr algn="l">
+              <a:spcAft>
+                <a:spcPts val="600"/>
+              </a:spcAft>
+            </a:pPr>
+            <a:r>
+              <a:rPr sz="2200" b="1">
+                <a:solidFill>
+                  <a:srgbClr val="1C1612"/>
+                </a:solidFill>
+                <a:latin typeface="Microsoft JhengHei"/>
+                <a:rFonts ascii="Microsoft JhengHei" hAnsi="Microsoft JhengHei" eastAsia="Microsoft JhengHei" cs="Microsoft JhengHei"/>
+              </a:rPr>
+              <a:t>電號＋三月用電</a:t>
+            </a:r>
+          </a:p>
+          <a:p>
+            <a:pPr algn="l">
+              <a:spcAft>
+                <a:spcPts val="600"/>
+              </a:spcAft>
+            </a:pPr>
+            <a:r>
+              <a:rPr sz="1400" b="0">
+                <a:solidFill>
+                  <a:srgbClr val="6B6258"/>
+                </a:solidFill>
+                <a:latin typeface="Microsoft JhengHei"/>
+                <a:rFonts ascii="Microsoft JhengHei" hAnsi="Microsoft JhengHei" eastAsia="Microsoft JhengHei" cs="Microsoft JhengHei"/>
+              </a:rPr>
+              <a:t>沒有戶籍、所得</a:t>
+            </a:r>
+          </a:p>
+        </p:txBody>
+      </p:sp>
+      <p:sp>
+        <p:nvSpPr>
+          <p:cNvPr id="9" name="Rounded Rectangle 8"/>
+          <p:cNvSpPr/>
+          <p:nvPr/>
+        </p:nvSpPr>
+        <p:spPr>
+          <a:xfrm>
+            <a:off x="6309360" y="1371600"/>
+            <a:ext cx="2651760" cy="4023360"/>
+          </a:xfrm>
+          <a:prstGeom prst="roundRect">
+            <a:avLst/>
+          </a:prstGeom>
+          <a:solidFill>
+            <a:srgbClr val="FBF7EE"/>
+          </a:solidFill>
+          <a:ln>
+            <a:solidFill>
+              <a:srgbClr val="D9D0C0"/>
+            </a:solidFill>
+          </a:ln>
+        </p:spPr>
+        <p:style>
+          <a:lnRef idx="1">
+            <a:schemeClr val="accent1"/>
+          </a:lnRef>
+          <a:fillRef idx="3">
+            <a:schemeClr val="accent1"/>
+          </a:fillRef>
+          <a:effectRef idx="2">
+            <a:schemeClr val="accent1"/>
+          </a:effectRef>
+          <a:fontRef idx="minor">
+            <a:schemeClr val="lt1"/>
+          </a:fontRef>
+        </p:style>
+        <p:txBody>
+          <a:bodyPr rtlCol="0" anchor="ctr"/>
+          <a:lstStyle/>
+          <a:p>
+            <a:pPr algn="ctr"/>
+          </a:p>
+        </p:txBody>
+      </p:sp>
+      <p:sp>
+        <p:nvSpPr>
+          <p:cNvPr id="10" name="TextBox 9"/>
+          <p:cNvSpPr txBox="1"/>
+          <p:nvPr/>
+        </p:nvSpPr>
+        <p:spPr>
+          <a:xfrm>
+            <a:off x="6473952" y="1554480"/>
+            <a:ext cx="2331720" cy="3657600"/>
+          </a:xfrm>
+          <a:prstGeom prst="rect">
+            <a:avLst/>
+          </a:prstGeom>
+          <a:noFill/>
+        </p:spPr>
+        <p:txBody>
+          <a:bodyPr wrap="square" anchor="t"/>
+          <a:lstStyle/>
+          <a:p>
+            <a:pPr algn="l">
+              <a:spcAft>
+                <a:spcPts val="600"/>
+              </a:spcAft>
+            </a:pPr>
+            <a:r>
+              <a:rPr sz="1400" b="1">
+                <a:solidFill>
+                  <a:srgbClr val="6B6258"/>
+                </a:solidFill>
+                <a:latin typeface="Microsoft JhengHei"/>
+                <a:rFonts ascii="Microsoft JhengHei" hAnsi="Microsoft JhengHei" eastAsia="Microsoft JhengHei" cs="Microsoft JhengHei"/>
+              </a:rPr>
+              <a:t>越權</a:t>
+            </a:r>
+          </a:p>
+          <a:p>
+            <a:pPr algn="l">
+              <a:spcAft>
+                <a:spcPts val="600"/>
+              </a:spcAft>
+            </a:pPr>
+            <a:r>
+              <a:rPr sz="2200" b="1">
+                <a:solidFill>
+                  <a:srgbClr val="1C1612"/>
+                </a:solidFill>
+                <a:latin typeface="Microsoft JhengHei"/>
+                <a:rFonts ascii="Microsoft JhengHei" hAnsi="Microsoft JhengHei" eastAsia="Microsoft JhengHei" cs="Microsoft JhengHei"/>
+              </a:rPr>
+              <a:t>乙要戶籍</a:t>
+            </a:r>
+          </a:p>
+          <a:p>
+            <a:pPr algn="l">
+              <a:spcAft>
+                <a:spcPts val="600"/>
+              </a:spcAft>
+            </a:pPr>
+            <a:r>
+              <a:rPr sz="1400" b="0">
+                <a:solidFill>
+                  <a:srgbClr val="9F1D1D"/>
+                </a:solidFill>
+                <a:latin typeface="Microsoft JhengHei"/>
+                <a:rFonts ascii="Microsoft JhengHei" hAnsi="Microsoft JhengHei" eastAsia="Microsoft JhengHei" cs="Microsoft JhengHei"/>
+              </a:rPr>
+              <a:t>403　半包也不給</a:t>
+            </a:r>
+          </a:p>
+        </p:txBody>
+      </p:sp>
+      <p:sp>
+        <p:nvSpPr>
+          <p:cNvPr id="11" name="Rounded Rectangle 10"/>
+          <p:cNvSpPr/>
+          <p:nvPr/>
+        </p:nvSpPr>
+        <p:spPr>
+          <a:xfrm>
+            <a:off x="9189720" y="1371600"/>
+            <a:ext cx="2651760" cy="4023360"/>
+          </a:xfrm>
+          <a:prstGeom prst="roundRect">
+            <a:avLst/>
+          </a:prstGeom>
+          <a:solidFill>
+            <a:srgbClr val="FBF7EE"/>
+          </a:solidFill>
+          <a:ln>
+            <a:solidFill>
+              <a:srgbClr val="D9D0C0"/>
+            </a:solidFill>
+          </a:ln>
+        </p:spPr>
+        <p:style>
+          <a:lnRef idx="1">
+            <a:schemeClr val="accent1"/>
+          </a:lnRef>
+          <a:fillRef idx="3">
+            <a:schemeClr val="accent1"/>
+          </a:fillRef>
+          <a:effectRef idx="2">
+            <a:schemeClr val="accent1"/>
+          </a:effectRef>
+          <a:fontRef idx="minor">
+            <a:schemeClr val="lt1"/>
+          </a:fontRef>
+        </p:style>
+        <p:txBody>
+          <a:bodyPr rtlCol="0" anchor="ctr"/>
+          <a:lstStyle/>
+          <a:p>
+            <a:pPr algn="ctr"/>
+          </a:p>
+        </p:txBody>
+      </p:sp>
+      <p:sp>
+        <p:nvSpPr>
+          <p:cNvPr id="12" name="TextBox 11"/>
+          <p:cNvSpPr txBox="1"/>
+          <p:nvPr/>
+        </p:nvSpPr>
+        <p:spPr>
+          <a:xfrm>
+            <a:off x="9354312" y="1554480"/>
+            <a:ext cx="2331720" cy="3657600"/>
+          </a:xfrm>
+          <a:prstGeom prst="rect">
+            <a:avLst/>
+          </a:prstGeom>
+          <a:noFill/>
+        </p:spPr>
+        <p:txBody>
+          <a:bodyPr wrap="square" anchor="t"/>
+          <a:lstStyle/>
+          <a:p>
+            <a:pPr algn="l">
+              <a:spcAft>
+                <a:spcPts val="600"/>
+              </a:spcAft>
+            </a:pPr>
+            <a:r>
+              <a:rPr sz="1400" b="1">
+                <a:solidFill>
+                  <a:srgbClr val="6B6258"/>
+                </a:solidFill>
+                <a:latin typeface="Microsoft JhengHei"/>
+                <a:rFonts ascii="Microsoft JhengHei" hAnsi="Microsoft JhengHei" eastAsia="Microsoft JhengHei" cs="Microsoft JhengHei"/>
+              </a:rPr>
+              <a:t>稽核</a:t>
+            </a:r>
+          </a:p>
+          <a:p>
+            <a:pPr algn="l">
+              <a:spcAft>
+                <a:spcPts val="600"/>
+              </a:spcAft>
+            </a:pPr>
+            <a:r>
+              <a:rPr sz="2200" b="1">
+                <a:solidFill>
+                  <a:srgbClr val="1C1612"/>
+                </a:solidFill>
+                <a:latin typeface="Microsoft JhengHei"/>
+                <a:rFonts ascii="Microsoft JhengHei" hAnsi="Microsoft JhengHei" eastAsia="Microsoft JhengHei" cs="Microsoft JhengHei"/>
+              </a:rPr>
+              <a:t>核准／擷取／送件</a:t>
+            </a:r>
+          </a:p>
+          <a:p>
+            <a:pPr algn="l">
+              <a:spcAft>
+                <a:spcPts val="600"/>
+              </a:spcAft>
+            </a:pPr>
+            <a:r>
+              <a:rPr sz="1400" b="0">
+                <a:solidFill>
+                  <a:srgbClr val="6B6258"/>
+                </a:solidFill>
+                <a:latin typeface="Microsoft JhengHei"/>
+                <a:rFonts ascii="Microsoft JhengHei" hAnsi="Microsoft JhengHei" eastAsia="Microsoft JhengHei" cs="Microsoft JhengHei"/>
+              </a:rPr>
+              <a:t>撤銷／拒絕</a:t>
+            </a:r>
+          </a:p>
+        </p:txBody>
+      </p:sp>
+      <p:sp>
+        <p:nvSpPr>
+          <p:cNvPr id="13" name="TextBox 12"/>
           <p:cNvSpPr txBox="1"/>
           <p:nvPr/>
         </p:nvSpPr>
@@ -7077,7 +7597,7 @@
       </p:sp>
       <p:sp>
         <p:nvSpPr>
-          <p:cNvPr id="7" name="TextBox 6"/>
+          <p:cNvPr id="14" name="TextBox 13"/>
           <p:cNvSpPr txBox="1"/>
           <p:nvPr/>
         </p:nvSpPr>

--- a/pitch/GrantOnce.pptx
+++ b/pitch/GrantOnce.pptx
@@ -4275,6 +4275,44 @@
                 <a:latin typeface="Microsoft JhengHei"/>
                 <a:rFonts ascii="Microsoft JhengHei" hAnsi="Microsoft JhengHei" eastAsia="Microsoft JhengHei" cs="Microsoft JhengHei"/>
               </a:rPr>
+              <a:t>OID4VP／登入是下一層。</a:t>
+            </a:r>
+          </a:p>
+        </p:txBody>
+      </p:sp>
+      <p:sp>
+        <p:nvSpPr>
+          <p:cNvPr id="6" name="TextBox 5"/>
+          <p:cNvSpPr txBox="1"/>
+          <p:nvPr/>
+        </p:nvSpPr>
+        <p:spPr>
+          <a:xfrm>
+            <a:off x="731520" y="3291840"/>
+            <a:ext cx="10515600" cy="457200"/>
+          </a:xfrm>
+          <a:prstGeom prst="rect">
+            <a:avLst/>
+          </a:prstGeom>
+          <a:noFill/>
+        </p:spPr>
+        <p:txBody>
+          <a:bodyPr wrap="square" anchor="t"/>
+          <a:lstStyle/>
+          <a:p>
+            <a:pPr algn="l">
+              <a:spcAft>
+                <a:spcPts val="600"/>
+              </a:spcAft>
+            </a:pPr>
+            <a:r>
+              <a:rPr sz="2000" b="0">
+                <a:solidFill>
+                  <a:srgbClr val="6B6258"/>
+                </a:solidFill>
+                <a:latin typeface="Microsoft JhengHei"/>
+                <a:rFonts ascii="Microsoft JhengHei" hAnsi="Microsoft JhengHei" eastAsia="Microsoft JhengHei" cs="Microsoft JhengHei"/>
+              </a:rPr>
               <a:t>週末用合成資料。</a:t>
             </a:r>
           </a:p>
@@ -4282,7 +4320,7 @@
       </p:sp>
       <p:sp>
         <p:nvSpPr>
-          <p:cNvPr id="6" name="Rectangle 5"/>
+          <p:cNvPr id="7" name="Rectangle 6"/>
           <p:cNvSpPr/>
           <p:nvPr/>
         </p:nvSpPr>
@@ -4325,7 +4363,7 @@
       </p:sp>
       <p:sp>
         <p:nvSpPr>
-          <p:cNvPr id="7" name="TextBox 6"/>
+          <p:cNvPr id="8" name="TextBox 7"/>
           <p:cNvSpPr txBox="1"/>
           <p:nvPr/>
         </p:nvSpPr>
@@ -4363,7 +4401,7 @@
       </p:sp>
       <p:sp>
         <p:nvSpPr>
-          <p:cNvPr id="8" name="TextBox 7"/>
+          <p:cNvPr id="9" name="TextBox 8"/>
           <p:cNvSpPr txBox="1"/>
           <p:nvPr/>
         </p:nvSpPr>
@@ -4401,7 +4439,7 @@
       </p:sp>
       <p:sp>
         <p:nvSpPr>
-          <p:cNvPr id="9" name="TextBox 8"/>
+          <p:cNvPr id="10" name="TextBox 9"/>
           <p:cNvSpPr txBox="1"/>
           <p:nvPr/>
         </p:nvSpPr>
@@ -6027,7 +6065,7 @@
                 <a:latin typeface="Microsoft JhengHei"/>
                 <a:rFonts ascii="Microsoft JhengHei" hAnsi="Microsoft JhengHei" eastAsia="Microsoft JhengHei" cs="Microsoft JhengHei"/>
               </a:rPr>
-              <a:t>乙要戶籍。</a:t>
+              <a:t>乙要戶籍。用匣號當票。</a:t>
             </a:r>
           </a:p>
         </p:txBody>
@@ -6096,14 +6134,14 @@
               </a:spcAft>
             </a:pPr>
             <a:r>
-              <a:rPr sz="2400" b="0">
+              <a:rPr sz="2000" b="0">
                 <a:solidFill>
                   <a:srgbClr val="6B6258"/>
                 </a:solidFill>
                 <a:latin typeface="Microsoft JhengHei"/>
                 <a:rFonts ascii="Microsoft JhengHei" hAnsi="Microsoft JhengHei" eastAsia="Microsoft JhengHei" cs="Microsoft JhengHei"/>
               </a:rPr>
-              <a:t>不回傳半包欄位。</a:t>
+              <a:t>OVERSCOPED · BAD_TICKET。不回傳半包。</a:t>
             </a:r>
           </a:p>
         </p:txBody>
@@ -6309,14 +6347,14 @@
               </a:spcAft>
             </a:pPr>
             <a:r>
-              <a:rPr sz="3600" b="1">
+              <a:rPr sz="3200" b="1">
                 <a:solidFill>
                   <a:srgbClr val="1C1612"/>
                 </a:solidFill>
                 <a:latin typeface="Microsoft JhengHei"/>
                 <a:rFonts ascii="Microsoft JhengHei" hAnsi="Microsoft JhengHei" eastAsia="Microsoft JhengHei" cs="Microsoft JhengHei"/>
               </a:rPr>
-              <a:t>送件  →  匣耗用。</a:t>
+              <a:t>送件  →  匣耗用。明文改收據。</a:t>
             </a:r>
           </a:p>
         </p:txBody>
@@ -6605,7 +6643,7 @@
                 <a:latin typeface="Microsoft JhengHei"/>
                 <a:rFonts ascii="Microsoft JhengHei" hAnsi="Microsoft JhengHei" eastAsia="Microsoft JhengHei" cs="Microsoft JhengHei"/>
               </a:rPr>
-              <a:t>Grant 白名單</a:t>
+              <a:t>HMAC ticket</a:t>
             </a:r>
           </a:p>
         </p:txBody>
@@ -6643,7 +6681,7 @@
                 <a:latin typeface="Microsoft JhengHei"/>
                 <a:rFonts ascii="Microsoft JhengHei" hAnsi="Microsoft JhengHei" eastAsia="Microsoft JhengHei" cs="Microsoft JhengHei"/>
               </a:rPr>
-              <a:t>Bearer Grant G-jia / G-yi。沒有 fields:*。</a:t>
+              <a:t>runtime 驗 iss／aud／fields／exp。匣號不是憑證。</a:t>
             </a:r>
           </a:p>
         </p:txBody>
@@ -6719,7 +6757,7 @@
                 <a:latin typeface="Microsoft JhengHei"/>
                 <a:rFonts ascii="Microsoft JhengHei" hAnsi="Microsoft JhengHei" eastAsia="Microsoft JhengHei" cs="Microsoft JhengHei"/>
               </a:rPr>
-              <a:t>甲、乙各存各的。不能聯集。</a:t>
+              <a:t>甲、乙各存各的。拿錯匣 403。</a:t>
             </a:r>
           </a:p>
         </p:txBody>
@@ -6871,7 +6909,7 @@
                 <a:latin typeface="Microsoft JhengHei"/>
                 <a:rFonts ascii="Microsoft JhengHei" hAnsi="Microsoft JhengHei" eastAsia="Microsoft JhengHei" cs="Microsoft JhengHei"/>
               </a:rPr>
-              <a:t>模型頂多改措辭。不能發匣、不能放行欄位。</a:t>
+              <a:t>模型不能發匣、不能核准、不能放行欄位。</a:t>
             </a:r>
           </a:p>
         </p:txBody>

--- a/pitch/GrantOnce.pptx
+++ b/pitch/GrantOnce.pptx
@@ -4275,44 +4275,6 @@
                 <a:latin typeface="Microsoft JhengHei"/>
                 <a:rFonts ascii="Microsoft JhengHei" hAnsi="Microsoft JhengHei" eastAsia="Microsoft JhengHei" cs="Microsoft JhengHei"/>
               </a:rPr>
-              <a:t>OID4VP／登入是下一層。</a:t>
-            </a:r>
-          </a:p>
-        </p:txBody>
-      </p:sp>
-      <p:sp>
-        <p:nvSpPr>
-          <p:cNvPr id="6" name="TextBox 5"/>
-          <p:cNvSpPr txBox="1"/>
-          <p:nvPr/>
-        </p:nvSpPr>
-        <p:spPr>
-          <a:xfrm>
-            <a:off x="731520" y="3291840"/>
-            <a:ext cx="10515600" cy="457200"/>
-          </a:xfrm>
-          <a:prstGeom prst="rect">
-            <a:avLst/>
-          </a:prstGeom>
-          <a:noFill/>
-        </p:spPr>
-        <p:txBody>
-          <a:bodyPr wrap="square" anchor="t"/>
-          <a:lstStyle/>
-          <a:p>
-            <a:pPr algn="l">
-              <a:spcAft>
-                <a:spcPts val="600"/>
-              </a:spcAft>
-            </a:pPr>
-            <a:r>
-              <a:rPr sz="2000" b="0">
-                <a:solidFill>
-                  <a:srgbClr val="6B6258"/>
-                </a:solidFill>
-                <a:latin typeface="Microsoft JhengHei"/>
-                <a:rFonts ascii="Microsoft JhengHei" hAnsi="Microsoft JhengHei" eastAsia="Microsoft JhengHei" cs="Microsoft JhengHei"/>
-              </a:rPr>
               <a:t>週末用合成資料。</a:t>
             </a:r>
           </a:p>
@@ -4320,7 +4282,7 @@
       </p:sp>
       <p:sp>
         <p:nvSpPr>
-          <p:cNvPr id="7" name="Rectangle 6"/>
+          <p:cNvPr id="6" name="Rectangle 5"/>
           <p:cNvSpPr/>
           <p:nvPr/>
         </p:nvSpPr>
@@ -4363,7 +4325,7 @@
       </p:sp>
       <p:sp>
         <p:nvSpPr>
-          <p:cNvPr id="8" name="TextBox 7"/>
+          <p:cNvPr id="7" name="TextBox 6"/>
           <p:cNvSpPr txBox="1"/>
           <p:nvPr/>
         </p:nvSpPr>
@@ -4401,7 +4363,7 @@
       </p:sp>
       <p:sp>
         <p:nvSpPr>
-          <p:cNvPr id="9" name="TextBox 8"/>
+          <p:cNvPr id="8" name="TextBox 7"/>
           <p:cNvSpPr txBox="1"/>
           <p:nvPr/>
         </p:nvSpPr>
@@ -4439,7 +4401,7 @@
       </p:sp>
       <p:sp>
         <p:nvSpPr>
-          <p:cNvPr id="10" name="TextBox 9"/>
+          <p:cNvPr id="9" name="TextBox 8"/>
           <p:cNvSpPr txBox="1"/>
           <p:nvPr/>
         </p:nvSpPr>
@@ -6065,7 +6027,7 @@
                 <a:latin typeface="Microsoft JhengHei"/>
                 <a:rFonts ascii="Microsoft JhengHei" hAnsi="Microsoft JhengHei" eastAsia="Microsoft JhengHei" cs="Microsoft JhengHei"/>
               </a:rPr>
-              <a:t>乙要戶籍。用匣號當票。</a:t>
+              <a:t>乙要戶籍。</a:t>
             </a:r>
           </a:p>
         </p:txBody>
@@ -6134,14 +6096,14 @@
               </a:spcAft>
             </a:pPr>
             <a:r>
-              <a:rPr sz="2000" b="0">
+              <a:rPr sz="2400" b="0">
                 <a:solidFill>
                   <a:srgbClr val="6B6258"/>
                 </a:solidFill>
                 <a:latin typeface="Microsoft JhengHei"/>
                 <a:rFonts ascii="Microsoft JhengHei" hAnsi="Microsoft JhengHei" eastAsia="Microsoft JhengHei" cs="Microsoft JhengHei"/>
               </a:rPr>
-              <a:t>OVERSCOPED · BAD_TICKET。不回傳半包。</a:t>
+              <a:t>不回傳半包欄位。</a:t>
             </a:r>
           </a:p>
         </p:txBody>
@@ -6347,14 +6309,14 @@
               </a:spcAft>
             </a:pPr>
             <a:r>
-              <a:rPr sz="3200" b="1">
+              <a:rPr sz="3600" b="1">
                 <a:solidFill>
                   <a:srgbClr val="1C1612"/>
                 </a:solidFill>
                 <a:latin typeface="Microsoft JhengHei"/>
                 <a:rFonts ascii="Microsoft JhengHei" hAnsi="Microsoft JhengHei" eastAsia="Microsoft JhengHei" cs="Microsoft JhengHei"/>
               </a:rPr>
-              <a:t>送件  →  匣耗用。明文改收據。</a:t>
+              <a:t>送件  →  匣耗用。</a:t>
             </a:r>
           </a:p>
         </p:txBody>
@@ -6643,7 +6605,7 @@
                 <a:latin typeface="Microsoft JhengHei"/>
                 <a:rFonts ascii="Microsoft JhengHei" hAnsi="Microsoft JhengHei" eastAsia="Microsoft JhengHei" cs="Microsoft JhengHei"/>
               </a:rPr>
-              <a:t>HMAC ticket</a:t>
+              <a:t>Grant 白名單</a:t>
             </a:r>
           </a:p>
         </p:txBody>
@@ -6681,7 +6643,7 @@
                 <a:latin typeface="Microsoft JhengHei"/>
                 <a:rFonts ascii="Microsoft JhengHei" hAnsi="Microsoft JhengHei" eastAsia="Microsoft JhengHei" cs="Microsoft JhengHei"/>
               </a:rPr>
-              <a:t>runtime 驗 iss／aud／fields／exp。匣號不是憑證。</a:t>
+              <a:t>Bearer Grant G-jia / G-yi。沒有 fields:*。</a:t>
             </a:r>
           </a:p>
         </p:txBody>
@@ -6757,7 +6719,7 @@
                 <a:latin typeface="Microsoft JhengHei"/>
                 <a:rFonts ascii="Microsoft JhengHei" hAnsi="Microsoft JhengHei" eastAsia="Microsoft JhengHei" cs="Microsoft JhengHei"/>
               </a:rPr>
-              <a:t>甲、乙各存各的。拿錯匣 403。</a:t>
+              <a:t>甲、乙各存各的。不能聯集。</a:t>
             </a:r>
           </a:p>
         </p:txBody>
@@ -6909,7 +6871,7 @@
                 <a:latin typeface="Microsoft JhengHei"/>
                 <a:rFonts ascii="Microsoft JhengHei" hAnsi="Microsoft JhengHei" eastAsia="Microsoft JhengHei" cs="Microsoft JhengHei"/>
               </a:rPr>
-              <a:t>模型不能發匣、不能核准、不能放行欄位。</a:t>
+              <a:t>模型頂多改措辭。不能發匣、不能放行欄位。</a:t>
             </a:r>
           </a:p>
         </p:txBody>
